--- a/showcase/out/Совет_директоров_накопители.pptx
+++ b/showcase/out/Совет_директоров_накопители.pptx
@@ -247,8 +247,7 @@
         <c:gapWidth val="60"/>
         <c:overlap val="0"/>
         <c:axId val="2094734554"/>
-        <c:axId val="2094734553"/>
-        <c:axId val="2094734556"/>
+        <c:axId val="2094734552"/>
       </c:barChart>
       <c:lineChart>
         <c:varyColors val="0"/>
@@ -399,7 +398,6 @@
         <c:marker val="1"/>
         <c:axId val="2094734555"/>
         <c:axId val="2094734553"/>
-        <c:axId val="2094734556"/>
       </c:lineChart>
       <c:catAx>
         <c:axId val="2094734554"/>
@@ -471,7 +469,7 @@
                     <a:solidFill>
                       <a:srgbClr val="000000"/>
                     </a:solidFill>
-                    <a:latin typeface="Arial"/>
+                    <a:latin typeface="Inter"/>
                   </a:defRPr>
                 </a:pPr>
                 <a:r>
@@ -479,7 +477,7 @@
                     <a:solidFill>
                       <a:srgbClr val="000000"/>
                     </a:solidFill>
-                    <a:latin typeface="Arial"/>
+                    <a:latin typeface="Inter"/>
                   </a:rPr>
                   <a:t>млн ₽</a:t>
                 </a:r>
@@ -541,7 +539,7 @@
                     <a:solidFill>
                       <a:srgbClr val="000000"/>
                     </a:solidFill>
-                    <a:latin typeface="Arial"/>
+                    <a:latin typeface="Inter"/>
                   </a:defRPr>
                 </a:pPr>
                 <a:r>
@@ -549,7 +547,7 @@
                     <a:solidFill>
                       <a:srgbClr val="000000"/>
                     </a:solidFill>
-                    <a:latin typeface="Arial"/>
+                    <a:latin typeface="Inter"/>
                   </a:rPr>
                   <a:t>маржа</a:t>
                 </a:r>
@@ -616,11 +614,11 @@
           <a:lstStyle/>
           <a:p>
             <a:pPr>
-              <a:defRPr sz="1100" b="0" i="0" u="none" strike="noStrike">
-                <a:solidFill>
-                  <a:srgbClr val="667085"/>
-                </a:solidFill>
-                <a:latin typeface="Inter"/>
+              <a:defRPr sz="1200" b="0" i="0" u="none" strike="noStrike">
+                <a:solidFill>
+                  <a:srgbClr val="000000"/>
+                </a:solidFill>
+                <a:latin typeface="Arial"/>
               </a:defRPr>
             </a:pPr>
             <a:endParaRPr lang="en-US"/>
